--- a/ゲーム科2年/00_前期/ゲーム開発Ⅰ/09_行列計算.pptx
+++ b/ゲーム科2年/00_前期/ゲーム開発Ⅰ/09_行列計算.pptx
@@ -274,7 +274,7 @@
           <a:p>
             <a:fld id="{E9CC885B-4903-4D54-9A93-00025F12DED9}" type="datetimeFigureOut">
               <a:rPr kumimoji="1" lang="ja-JP" altLang="en-US" smtClean="0"/>
-              <a:t>2024/9/30</a:t>
+              <a:t>2025/1/6</a:t>
             </a:fld>
             <a:endParaRPr kumimoji="1" lang="ja-JP" altLang="en-US"/>
           </a:p>
@@ -504,7 +504,7 @@
           <a:p>
             <a:fld id="{E9CC885B-4903-4D54-9A93-00025F12DED9}" type="datetimeFigureOut">
               <a:rPr kumimoji="1" lang="ja-JP" altLang="en-US" smtClean="0"/>
-              <a:t>2024/9/30</a:t>
+              <a:t>2025/1/6</a:t>
             </a:fld>
             <a:endParaRPr kumimoji="1" lang="ja-JP" altLang="en-US"/>
           </a:p>
@@ -744,7 +744,7 @@
           <a:p>
             <a:fld id="{E9CC885B-4903-4D54-9A93-00025F12DED9}" type="datetimeFigureOut">
               <a:rPr kumimoji="1" lang="ja-JP" altLang="en-US" smtClean="0"/>
-              <a:t>2024/9/30</a:t>
+              <a:t>2025/1/6</a:t>
             </a:fld>
             <a:endParaRPr kumimoji="1" lang="ja-JP" altLang="en-US"/>
           </a:p>
@@ -974,7 +974,7 @@
           <a:p>
             <a:fld id="{E9CC885B-4903-4D54-9A93-00025F12DED9}" type="datetimeFigureOut">
               <a:rPr kumimoji="1" lang="ja-JP" altLang="en-US" smtClean="0"/>
-              <a:t>2024/9/30</a:t>
+              <a:t>2025/1/6</a:t>
             </a:fld>
             <a:endParaRPr kumimoji="1" lang="ja-JP" altLang="en-US"/>
           </a:p>
@@ -1249,7 +1249,7 @@
           <a:p>
             <a:fld id="{E9CC885B-4903-4D54-9A93-00025F12DED9}" type="datetimeFigureOut">
               <a:rPr kumimoji="1" lang="ja-JP" altLang="en-US" smtClean="0"/>
-              <a:t>2024/9/30</a:t>
+              <a:t>2025/1/6</a:t>
             </a:fld>
             <a:endParaRPr kumimoji="1" lang="ja-JP" altLang="en-US"/>
           </a:p>
@@ -1578,7 +1578,7 @@
           <a:p>
             <a:fld id="{E9CC885B-4903-4D54-9A93-00025F12DED9}" type="datetimeFigureOut">
               <a:rPr kumimoji="1" lang="ja-JP" altLang="en-US" smtClean="0"/>
-              <a:t>2024/9/30</a:t>
+              <a:t>2025/1/6</a:t>
             </a:fld>
             <a:endParaRPr kumimoji="1" lang="ja-JP" altLang="en-US"/>
           </a:p>
@@ -2054,7 +2054,7 @@
           <a:p>
             <a:fld id="{E9CC885B-4903-4D54-9A93-00025F12DED9}" type="datetimeFigureOut">
               <a:rPr kumimoji="1" lang="ja-JP" altLang="en-US" smtClean="0"/>
-              <a:t>2024/9/30</a:t>
+              <a:t>2025/1/6</a:t>
             </a:fld>
             <a:endParaRPr kumimoji="1" lang="ja-JP" altLang="en-US"/>
           </a:p>
@@ -2195,7 +2195,7 @@
           <a:p>
             <a:fld id="{E9CC885B-4903-4D54-9A93-00025F12DED9}" type="datetimeFigureOut">
               <a:rPr kumimoji="1" lang="ja-JP" altLang="en-US" smtClean="0"/>
-              <a:t>2024/9/30</a:t>
+              <a:t>2025/1/6</a:t>
             </a:fld>
             <a:endParaRPr kumimoji="1" lang="ja-JP" altLang="en-US"/>
           </a:p>
@@ -2308,7 +2308,7 @@
           <a:p>
             <a:fld id="{E9CC885B-4903-4D54-9A93-00025F12DED9}" type="datetimeFigureOut">
               <a:rPr kumimoji="1" lang="ja-JP" altLang="en-US" smtClean="0"/>
-              <a:t>2024/9/30</a:t>
+              <a:t>2025/1/6</a:t>
             </a:fld>
             <a:endParaRPr kumimoji="1" lang="ja-JP" altLang="en-US"/>
           </a:p>
@@ -2651,7 +2651,7 @@
           <a:p>
             <a:fld id="{E9CC885B-4903-4D54-9A93-00025F12DED9}" type="datetimeFigureOut">
               <a:rPr kumimoji="1" lang="ja-JP" altLang="en-US" smtClean="0"/>
-              <a:t>2024/9/30</a:t>
+              <a:t>2025/1/6</a:t>
             </a:fld>
             <a:endParaRPr kumimoji="1" lang="ja-JP" altLang="en-US"/>
           </a:p>
@@ -2939,7 +2939,7 @@
           <a:p>
             <a:fld id="{E9CC885B-4903-4D54-9A93-00025F12DED9}" type="datetimeFigureOut">
               <a:rPr kumimoji="1" lang="ja-JP" altLang="en-US" smtClean="0"/>
-              <a:t>2024/9/30</a:t>
+              <a:t>2025/1/6</a:t>
             </a:fld>
             <a:endParaRPr kumimoji="1" lang="ja-JP" altLang="en-US"/>
           </a:p>
@@ -3212,7 +3212,7 @@
           <a:p>
             <a:fld id="{E9CC885B-4903-4D54-9A93-00025F12DED9}" type="datetimeFigureOut">
               <a:rPr kumimoji="1" lang="ja-JP" altLang="en-US" smtClean="0"/>
-              <a:t>2024/9/30</a:t>
+              <a:t>2025/1/6</a:t>
             </a:fld>
             <a:endParaRPr kumimoji="1" lang="ja-JP" altLang="en-US"/>
           </a:p>
@@ -6215,8 +6215,8 @@
           </a:p>
         </p:txBody>
       </p:sp>
-      <mc:AlternateContent xmlns:mc="http://schemas.openxmlformats.org/markup-compatibility/2006">
-        <mc:Choice xmlns:a14="http://schemas.microsoft.com/office/drawing/2010/main" Requires="a14">
+      <mc:AlternateContent xmlns:mc="http://schemas.openxmlformats.org/markup-compatibility/2006" xmlns:a14="http://schemas.microsoft.com/office/drawing/2010/main">
+        <mc:Choice Requires="a14">
           <p:sp>
             <p:nvSpPr>
               <p:cNvPr id="6" name="テキスト ボックス 5">
@@ -6721,7 +6721,7 @@
             </p:txBody>
           </p:sp>
         </mc:Choice>
-        <mc:Fallback>
+        <mc:Fallback xmlns="">
           <p:sp>
             <p:nvSpPr>
               <p:cNvPr id="6" name="テキスト ボックス 5">
@@ -7192,8 +7192,8 @@
           </a:p>
         </p:txBody>
       </p:sp>
-      <mc:AlternateContent xmlns:mc="http://schemas.openxmlformats.org/markup-compatibility/2006" xmlns:a14="http://schemas.microsoft.com/office/drawing/2010/main">
-        <mc:Choice Requires="a14">
+      <mc:AlternateContent xmlns:mc="http://schemas.openxmlformats.org/markup-compatibility/2006">
+        <mc:Choice xmlns:a14="http://schemas.microsoft.com/office/drawing/2010/main" Requires="a14">
           <p:sp>
             <p:nvSpPr>
               <p:cNvPr id="6" name="テキスト ボックス 5">
@@ -7260,10 +7260,18 @@
               </a:p>
               <a:p>
                 <a:r>
-                  <a:rPr lang="ja-JP" altLang="en-US" sz="2400" dirty="0"/>
+                  <a:rPr lang="ja-JP" altLang="en-US" sz="2400" b="1" dirty="0">
+                    <a:solidFill>
+                      <a:srgbClr val="FF0000"/>
+                    </a:solidFill>
+                  </a:rPr>
                   <a:t>■単位行列</a:t>
                 </a:r>
-                <a:endParaRPr lang="en-US" altLang="ja-JP" sz="2400" dirty="0"/>
+                <a:endParaRPr lang="en-US" altLang="ja-JP" sz="2400" b="1" dirty="0">
+                  <a:solidFill>
+                    <a:srgbClr val="FF0000"/>
+                  </a:solidFill>
+                </a:endParaRPr>
               </a:p>
               <a:p>
                 <a:pPr/>
@@ -7460,7 +7468,7 @@
             </p:txBody>
           </p:sp>
         </mc:Choice>
-        <mc:Fallback xmlns="">
+        <mc:Fallback>
           <p:sp>
             <p:nvSpPr>
               <p:cNvPr id="6" name="テキスト ボックス 5">
@@ -9013,8 +9021,8 @@
           </a:p>
         </p:txBody>
       </p:sp>
-      <mc:AlternateContent xmlns:mc="http://schemas.openxmlformats.org/markup-compatibility/2006">
-        <mc:Choice xmlns:a14="http://schemas.microsoft.com/office/drawing/2010/main" Requires="a14">
+      <mc:AlternateContent xmlns:mc="http://schemas.openxmlformats.org/markup-compatibility/2006" xmlns:a14="http://schemas.microsoft.com/office/drawing/2010/main">
+        <mc:Choice Requires="a14">
           <p:sp>
             <p:nvSpPr>
               <p:cNvPr id="6" name="テキスト ボックス 5">
@@ -9463,7 +9471,7 @@
             </p:txBody>
           </p:sp>
         </mc:Choice>
-        <mc:Fallback>
+        <mc:Fallback xmlns="">
           <p:sp>
             <p:nvSpPr>
               <p:cNvPr id="6" name="テキスト ボックス 5">

--- a/ゲーム科2年/00_前期/ゲーム開発Ⅰ/09_行列計算.pptx
+++ b/ゲーム科2年/00_前期/ゲーム開発Ⅰ/09_行列計算.pptx
@@ -274,7 +274,7 @@
           <a:p>
             <a:fld id="{E9CC885B-4903-4D54-9A93-00025F12DED9}" type="datetimeFigureOut">
               <a:rPr kumimoji="1" lang="ja-JP" altLang="en-US" smtClean="0"/>
-              <a:t>2025/1/6</a:t>
+              <a:t>2025/2/7</a:t>
             </a:fld>
             <a:endParaRPr kumimoji="1" lang="ja-JP" altLang="en-US"/>
           </a:p>
@@ -504,7 +504,7 @@
           <a:p>
             <a:fld id="{E9CC885B-4903-4D54-9A93-00025F12DED9}" type="datetimeFigureOut">
               <a:rPr kumimoji="1" lang="ja-JP" altLang="en-US" smtClean="0"/>
-              <a:t>2025/1/6</a:t>
+              <a:t>2025/2/7</a:t>
             </a:fld>
             <a:endParaRPr kumimoji="1" lang="ja-JP" altLang="en-US"/>
           </a:p>
@@ -744,7 +744,7 @@
           <a:p>
             <a:fld id="{E9CC885B-4903-4D54-9A93-00025F12DED9}" type="datetimeFigureOut">
               <a:rPr kumimoji="1" lang="ja-JP" altLang="en-US" smtClean="0"/>
-              <a:t>2025/1/6</a:t>
+              <a:t>2025/2/7</a:t>
             </a:fld>
             <a:endParaRPr kumimoji="1" lang="ja-JP" altLang="en-US"/>
           </a:p>
@@ -974,7 +974,7 @@
           <a:p>
             <a:fld id="{E9CC885B-4903-4D54-9A93-00025F12DED9}" type="datetimeFigureOut">
               <a:rPr kumimoji="1" lang="ja-JP" altLang="en-US" smtClean="0"/>
-              <a:t>2025/1/6</a:t>
+              <a:t>2025/2/7</a:t>
             </a:fld>
             <a:endParaRPr kumimoji="1" lang="ja-JP" altLang="en-US"/>
           </a:p>
@@ -1249,7 +1249,7 @@
           <a:p>
             <a:fld id="{E9CC885B-4903-4D54-9A93-00025F12DED9}" type="datetimeFigureOut">
               <a:rPr kumimoji="1" lang="ja-JP" altLang="en-US" smtClean="0"/>
-              <a:t>2025/1/6</a:t>
+              <a:t>2025/2/7</a:t>
             </a:fld>
             <a:endParaRPr kumimoji="1" lang="ja-JP" altLang="en-US"/>
           </a:p>
@@ -1578,7 +1578,7 @@
           <a:p>
             <a:fld id="{E9CC885B-4903-4D54-9A93-00025F12DED9}" type="datetimeFigureOut">
               <a:rPr kumimoji="1" lang="ja-JP" altLang="en-US" smtClean="0"/>
-              <a:t>2025/1/6</a:t>
+              <a:t>2025/2/7</a:t>
             </a:fld>
             <a:endParaRPr kumimoji="1" lang="ja-JP" altLang="en-US"/>
           </a:p>
@@ -2054,7 +2054,7 @@
           <a:p>
             <a:fld id="{E9CC885B-4903-4D54-9A93-00025F12DED9}" type="datetimeFigureOut">
               <a:rPr kumimoji="1" lang="ja-JP" altLang="en-US" smtClean="0"/>
-              <a:t>2025/1/6</a:t>
+              <a:t>2025/2/7</a:t>
             </a:fld>
             <a:endParaRPr kumimoji="1" lang="ja-JP" altLang="en-US"/>
           </a:p>
@@ -2195,7 +2195,7 @@
           <a:p>
             <a:fld id="{E9CC885B-4903-4D54-9A93-00025F12DED9}" type="datetimeFigureOut">
               <a:rPr kumimoji="1" lang="ja-JP" altLang="en-US" smtClean="0"/>
-              <a:t>2025/1/6</a:t>
+              <a:t>2025/2/7</a:t>
             </a:fld>
             <a:endParaRPr kumimoji="1" lang="ja-JP" altLang="en-US"/>
           </a:p>
@@ -2308,7 +2308,7 @@
           <a:p>
             <a:fld id="{E9CC885B-4903-4D54-9A93-00025F12DED9}" type="datetimeFigureOut">
               <a:rPr kumimoji="1" lang="ja-JP" altLang="en-US" smtClean="0"/>
-              <a:t>2025/1/6</a:t>
+              <a:t>2025/2/7</a:t>
             </a:fld>
             <a:endParaRPr kumimoji="1" lang="ja-JP" altLang="en-US"/>
           </a:p>
@@ -2651,7 +2651,7 @@
           <a:p>
             <a:fld id="{E9CC885B-4903-4D54-9A93-00025F12DED9}" type="datetimeFigureOut">
               <a:rPr kumimoji="1" lang="ja-JP" altLang="en-US" smtClean="0"/>
-              <a:t>2025/1/6</a:t>
+              <a:t>2025/2/7</a:t>
             </a:fld>
             <a:endParaRPr kumimoji="1" lang="ja-JP" altLang="en-US"/>
           </a:p>
@@ -2939,7 +2939,7 @@
           <a:p>
             <a:fld id="{E9CC885B-4903-4D54-9A93-00025F12DED9}" type="datetimeFigureOut">
               <a:rPr kumimoji="1" lang="ja-JP" altLang="en-US" smtClean="0"/>
-              <a:t>2025/1/6</a:t>
+              <a:t>2025/2/7</a:t>
             </a:fld>
             <a:endParaRPr kumimoji="1" lang="ja-JP" altLang="en-US"/>
           </a:p>
@@ -3212,7 +3212,7 @@
           <a:p>
             <a:fld id="{E9CC885B-4903-4D54-9A93-00025F12DED9}" type="datetimeFigureOut">
               <a:rPr kumimoji="1" lang="ja-JP" altLang="en-US" smtClean="0"/>
-              <a:t>2025/1/6</a:t>
+              <a:t>2025/2/7</a:t>
             </a:fld>
             <a:endParaRPr kumimoji="1" lang="ja-JP" altLang="en-US"/>
           </a:p>
@@ -3680,7 +3680,7 @@
         <p:spPr>
           <a:xfrm>
             <a:off x="567542" y="1216429"/>
-            <a:ext cx="8895384" cy="3416320"/>
+            <a:ext cx="8895384" cy="3785652"/>
           </a:xfrm>
           <a:prstGeom prst="rect">
             <a:avLst/>
@@ -3738,7 +3738,7 @@
           <a:p>
             <a:r>
               <a:rPr lang="ja-JP" altLang="en-US" sz="2400" dirty="0"/>
-              <a:t>・ （</a:t>
+              <a:t>・ </a:t>
             </a:r>
             <a:r>
               <a:rPr lang="en-US" altLang="ja-JP" sz="2400" dirty="0"/>
@@ -3746,7 +3746,14 @@
             </a:r>
             <a:r>
               <a:rPr lang="ja-JP" altLang="en-US" sz="2400" dirty="0"/>
-              <a:t>で作ろうとすると頻繁に使います）</a:t>
+              <a:t>でゲームを作ろうとすると頻繁に使います</a:t>
+            </a:r>
+            <a:endParaRPr lang="en-US" altLang="ja-JP" sz="2400" dirty="0"/>
+          </a:p>
+          <a:p>
+            <a:r>
+              <a:rPr lang="ja-JP" altLang="en-US" sz="2400" dirty="0"/>
+              <a:t>・シェーダーでも頻繁に使います</a:t>
             </a:r>
             <a:endParaRPr lang="en-US" altLang="ja-JP" sz="2400" dirty="0"/>
           </a:p>
@@ -7192,8 +7199,8 @@
           </a:p>
         </p:txBody>
       </p:sp>
-      <mc:AlternateContent xmlns:mc="http://schemas.openxmlformats.org/markup-compatibility/2006">
-        <mc:Choice xmlns:a14="http://schemas.microsoft.com/office/drawing/2010/main" Requires="a14">
+      <mc:AlternateContent xmlns:mc="http://schemas.openxmlformats.org/markup-compatibility/2006" xmlns:a14="http://schemas.microsoft.com/office/drawing/2010/main">
+        <mc:Choice Requires="a14">
           <p:sp>
             <p:nvSpPr>
               <p:cNvPr id="6" name="テキスト ボックス 5">
@@ -7468,7 +7475,7 @@
             </p:txBody>
           </p:sp>
         </mc:Choice>
-        <mc:Fallback>
+        <mc:Fallback xmlns="">
           <p:sp>
             <p:nvSpPr>
               <p:cNvPr id="6" name="テキスト ボックス 5">

--- a/ゲーム科2年/00_前期/ゲーム開発Ⅰ/09_行列計算.pptx
+++ b/ゲーム科2年/00_前期/ゲーム開発Ⅰ/09_行列計算.pptx
@@ -274,7 +274,7 @@
           <a:p>
             <a:fld id="{E9CC885B-4903-4D54-9A93-00025F12DED9}" type="datetimeFigureOut">
               <a:rPr kumimoji="1" lang="ja-JP" altLang="en-US" smtClean="0"/>
-              <a:t>2025/2/7</a:t>
+              <a:t>2025/4/15</a:t>
             </a:fld>
             <a:endParaRPr kumimoji="1" lang="ja-JP" altLang="en-US"/>
           </a:p>
@@ -504,7 +504,7 @@
           <a:p>
             <a:fld id="{E9CC885B-4903-4D54-9A93-00025F12DED9}" type="datetimeFigureOut">
               <a:rPr kumimoji="1" lang="ja-JP" altLang="en-US" smtClean="0"/>
-              <a:t>2025/2/7</a:t>
+              <a:t>2025/4/15</a:t>
             </a:fld>
             <a:endParaRPr kumimoji="1" lang="ja-JP" altLang="en-US"/>
           </a:p>
@@ -744,7 +744,7 @@
           <a:p>
             <a:fld id="{E9CC885B-4903-4D54-9A93-00025F12DED9}" type="datetimeFigureOut">
               <a:rPr kumimoji="1" lang="ja-JP" altLang="en-US" smtClean="0"/>
-              <a:t>2025/2/7</a:t>
+              <a:t>2025/4/15</a:t>
             </a:fld>
             <a:endParaRPr kumimoji="1" lang="ja-JP" altLang="en-US"/>
           </a:p>
@@ -974,7 +974,7 @@
           <a:p>
             <a:fld id="{E9CC885B-4903-4D54-9A93-00025F12DED9}" type="datetimeFigureOut">
               <a:rPr kumimoji="1" lang="ja-JP" altLang="en-US" smtClean="0"/>
-              <a:t>2025/2/7</a:t>
+              <a:t>2025/4/15</a:t>
             </a:fld>
             <a:endParaRPr kumimoji="1" lang="ja-JP" altLang="en-US"/>
           </a:p>
@@ -1249,7 +1249,7 @@
           <a:p>
             <a:fld id="{E9CC885B-4903-4D54-9A93-00025F12DED9}" type="datetimeFigureOut">
               <a:rPr kumimoji="1" lang="ja-JP" altLang="en-US" smtClean="0"/>
-              <a:t>2025/2/7</a:t>
+              <a:t>2025/4/15</a:t>
             </a:fld>
             <a:endParaRPr kumimoji="1" lang="ja-JP" altLang="en-US"/>
           </a:p>
@@ -1578,7 +1578,7 @@
           <a:p>
             <a:fld id="{E9CC885B-4903-4D54-9A93-00025F12DED9}" type="datetimeFigureOut">
               <a:rPr kumimoji="1" lang="ja-JP" altLang="en-US" smtClean="0"/>
-              <a:t>2025/2/7</a:t>
+              <a:t>2025/4/15</a:t>
             </a:fld>
             <a:endParaRPr kumimoji="1" lang="ja-JP" altLang="en-US"/>
           </a:p>
@@ -2054,7 +2054,7 @@
           <a:p>
             <a:fld id="{E9CC885B-4903-4D54-9A93-00025F12DED9}" type="datetimeFigureOut">
               <a:rPr kumimoji="1" lang="ja-JP" altLang="en-US" smtClean="0"/>
-              <a:t>2025/2/7</a:t>
+              <a:t>2025/4/15</a:t>
             </a:fld>
             <a:endParaRPr kumimoji="1" lang="ja-JP" altLang="en-US"/>
           </a:p>
@@ -2195,7 +2195,7 @@
           <a:p>
             <a:fld id="{E9CC885B-4903-4D54-9A93-00025F12DED9}" type="datetimeFigureOut">
               <a:rPr kumimoji="1" lang="ja-JP" altLang="en-US" smtClean="0"/>
-              <a:t>2025/2/7</a:t>
+              <a:t>2025/4/15</a:t>
             </a:fld>
             <a:endParaRPr kumimoji="1" lang="ja-JP" altLang="en-US"/>
           </a:p>
@@ -2308,7 +2308,7 @@
           <a:p>
             <a:fld id="{E9CC885B-4903-4D54-9A93-00025F12DED9}" type="datetimeFigureOut">
               <a:rPr kumimoji="1" lang="ja-JP" altLang="en-US" smtClean="0"/>
-              <a:t>2025/2/7</a:t>
+              <a:t>2025/4/15</a:t>
             </a:fld>
             <a:endParaRPr kumimoji="1" lang="ja-JP" altLang="en-US"/>
           </a:p>
@@ -2651,7 +2651,7 @@
           <a:p>
             <a:fld id="{E9CC885B-4903-4D54-9A93-00025F12DED9}" type="datetimeFigureOut">
               <a:rPr kumimoji="1" lang="ja-JP" altLang="en-US" smtClean="0"/>
-              <a:t>2025/2/7</a:t>
+              <a:t>2025/4/15</a:t>
             </a:fld>
             <a:endParaRPr kumimoji="1" lang="ja-JP" altLang="en-US"/>
           </a:p>
@@ -2939,7 +2939,7 @@
           <a:p>
             <a:fld id="{E9CC885B-4903-4D54-9A93-00025F12DED9}" type="datetimeFigureOut">
               <a:rPr kumimoji="1" lang="ja-JP" altLang="en-US" smtClean="0"/>
-              <a:t>2025/2/7</a:t>
+              <a:t>2025/4/15</a:t>
             </a:fld>
             <a:endParaRPr kumimoji="1" lang="ja-JP" altLang="en-US"/>
           </a:p>
@@ -3212,7 +3212,7 @@
           <a:p>
             <a:fld id="{E9CC885B-4903-4D54-9A93-00025F12DED9}" type="datetimeFigureOut">
               <a:rPr kumimoji="1" lang="ja-JP" altLang="en-US" smtClean="0"/>
-              <a:t>2025/2/7</a:t>
+              <a:t>2025/4/15</a:t>
             </a:fld>
             <a:endParaRPr kumimoji="1" lang="ja-JP" altLang="en-US"/>
           </a:p>
@@ -9589,8 +9589,8 @@
           </a:p>
         </p:txBody>
       </p:sp>
-      <mc:AlternateContent xmlns:mc="http://schemas.openxmlformats.org/markup-compatibility/2006" xmlns:a14="http://schemas.microsoft.com/office/drawing/2010/main">
-        <mc:Choice Requires="a14">
+      <mc:AlternateContent xmlns:mc="http://schemas.openxmlformats.org/markup-compatibility/2006">
+        <mc:Choice xmlns:a14="http://schemas.microsoft.com/office/drawing/2010/main" Requires="a14">
           <p:sp>
             <p:nvSpPr>
               <p:cNvPr id="6" name="テキスト ボックス 5">
@@ -9917,10 +9917,10 @@
                                   <m:t>2×15+</m:t>
                                 </m:r>
                                 <m:r>
-                                  <a:rPr lang="en-US" altLang="ja-JP" sz="2400" b="0" i="1" smtClean="0">
-                                    <a:latin typeface="Cambria Math" panose="02040503050406030204" pitchFamily="18" charset="0"/>
-                                  </a:rPr>
-                                  <m:t>2</m:t>
+                                  <a:rPr lang="en-US" altLang="ja-JP" sz="2400" b="0" i="1">
+                                    <a:latin typeface="Cambria Math" panose="02040503050406030204" pitchFamily="18" charset="0"/>
+                                  </a:rPr>
+                                  <m:t>9</m:t>
                                 </m:r>
                                 <m:r>
                                   <a:rPr lang="en-US" altLang="ja-JP" sz="2400" i="1">
@@ -10027,7 +10027,7 @@
             </p:txBody>
           </p:sp>
         </mc:Choice>
-        <mc:Fallback xmlns="">
+        <mc:Fallback>
           <p:sp>
             <p:nvSpPr>
               <p:cNvPr id="6" name="テキスト ボックス 5">

--- a/ゲーム科2年/00_前期/ゲーム開発Ⅰ/09_行列計算.pptx
+++ b/ゲーム科2年/00_前期/ゲーム開発Ⅰ/09_行列計算.pptx
@@ -274,7 +274,7 @@
           <a:p>
             <a:fld id="{E9CC885B-4903-4D54-9A93-00025F12DED9}" type="datetimeFigureOut">
               <a:rPr kumimoji="1" lang="ja-JP" altLang="en-US" smtClean="0"/>
-              <a:t>2025/4/15</a:t>
+              <a:t>2026/2/4</a:t>
             </a:fld>
             <a:endParaRPr kumimoji="1" lang="ja-JP" altLang="en-US"/>
           </a:p>
@@ -504,7 +504,7 @@
           <a:p>
             <a:fld id="{E9CC885B-4903-4D54-9A93-00025F12DED9}" type="datetimeFigureOut">
               <a:rPr kumimoji="1" lang="ja-JP" altLang="en-US" smtClean="0"/>
-              <a:t>2025/4/15</a:t>
+              <a:t>2026/2/4</a:t>
             </a:fld>
             <a:endParaRPr kumimoji="1" lang="ja-JP" altLang="en-US"/>
           </a:p>
@@ -744,7 +744,7 @@
           <a:p>
             <a:fld id="{E9CC885B-4903-4D54-9A93-00025F12DED9}" type="datetimeFigureOut">
               <a:rPr kumimoji="1" lang="ja-JP" altLang="en-US" smtClean="0"/>
-              <a:t>2025/4/15</a:t>
+              <a:t>2026/2/4</a:t>
             </a:fld>
             <a:endParaRPr kumimoji="1" lang="ja-JP" altLang="en-US"/>
           </a:p>
@@ -974,7 +974,7 @@
           <a:p>
             <a:fld id="{E9CC885B-4903-4D54-9A93-00025F12DED9}" type="datetimeFigureOut">
               <a:rPr kumimoji="1" lang="ja-JP" altLang="en-US" smtClean="0"/>
-              <a:t>2025/4/15</a:t>
+              <a:t>2026/2/4</a:t>
             </a:fld>
             <a:endParaRPr kumimoji="1" lang="ja-JP" altLang="en-US"/>
           </a:p>
@@ -1249,7 +1249,7 @@
           <a:p>
             <a:fld id="{E9CC885B-4903-4D54-9A93-00025F12DED9}" type="datetimeFigureOut">
               <a:rPr kumimoji="1" lang="ja-JP" altLang="en-US" smtClean="0"/>
-              <a:t>2025/4/15</a:t>
+              <a:t>2026/2/4</a:t>
             </a:fld>
             <a:endParaRPr kumimoji="1" lang="ja-JP" altLang="en-US"/>
           </a:p>
@@ -1578,7 +1578,7 @@
           <a:p>
             <a:fld id="{E9CC885B-4903-4D54-9A93-00025F12DED9}" type="datetimeFigureOut">
               <a:rPr kumimoji="1" lang="ja-JP" altLang="en-US" smtClean="0"/>
-              <a:t>2025/4/15</a:t>
+              <a:t>2026/2/4</a:t>
             </a:fld>
             <a:endParaRPr kumimoji="1" lang="ja-JP" altLang="en-US"/>
           </a:p>
@@ -2054,7 +2054,7 @@
           <a:p>
             <a:fld id="{E9CC885B-4903-4D54-9A93-00025F12DED9}" type="datetimeFigureOut">
               <a:rPr kumimoji="1" lang="ja-JP" altLang="en-US" smtClean="0"/>
-              <a:t>2025/4/15</a:t>
+              <a:t>2026/2/4</a:t>
             </a:fld>
             <a:endParaRPr kumimoji="1" lang="ja-JP" altLang="en-US"/>
           </a:p>
@@ -2195,7 +2195,7 @@
           <a:p>
             <a:fld id="{E9CC885B-4903-4D54-9A93-00025F12DED9}" type="datetimeFigureOut">
               <a:rPr kumimoji="1" lang="ja-JP" altLang="en-US" smtClean="0"/>
-              <a:t>2025/4/15</a:t>
+              <a:t>2026/2/4</a:t>
             </a:fld>
             <a:endParaRPr kumimoji="1" lang="ja-JP" altLang="en-US"/>
           </a:p>
@@ -2308,7 +2308,7 @@
           <a:p>
             <a:fld id="{E9CC885B-4903-4D54-9A93-00025F12DED9}" type="datetimeFigureOut">
               <a:rPr kumimoji="1" lang="ja-JP" altLang="en-US" smtClean="0"/>
-              <a:t>2025/4/15</a:t>
+              <a:t>2026/2/4</a:t>
             </a:fld>
             <a:endParaRPr kumimoji="1" lang="ja-JP" altLang="en-US"/>
           </a:p>
@@ -2651,7 +2651,7 @@
           <a:p>
             <a:fld id="{E9CC885B-4903-4D54-9A93-00025F12DED9}" type="datetimeFigureOut">
               <a:rPr kumimoji="1" lang="ja-JP" altLang="en-US" smtClean="0"/>
-              <a:t>2025/4/15</a:t>
+              <a:t>2026/2/4</a:t>
             </a:fld>
             <a:endParaRPr kumimoji="1" lang="ja-JP" altLang="en-US"/>
           </a:p>
@@ -2939,7 +2939,7 @@
           <a:p>
             <a:fld id="{E9CC885B-4903-4D54-9A93-00025F12DED9}" type="datetimeFigureOut">
               <a:rPr kumimoji="1" lang="ja-JP" altLang="en-US" smtClean="0"/>
-              <a:t>2025/4/15</a:t>
+              <a:t>2026/2/4</a:t>
             </a:fld>
             <a:endParaRPr kumimoji="1" lang="ja-JP" altLang="en-US"/>
           </a:p>
@@ -3212,7 +3212,7 @@
           <a:p>
             <a:fld id="{E9CC885B-4903-4D54-9A93-00025F12DED9}" type="datetimeFigureOut">
               <a:rPr kumimoji="1" lang="ja-JP" altLang="en-US" smtClean="0"/>
-              <a:t>2025/4/15</a:t>
+              <a:t>2026/2/4</a:t>
             </a:fld>
             <a:endParaRPr kumimoji="1" lang="ja-JP" altLang="en-US"/>
           </a:p>
@@ -3880,10 +3880,10 @@
       </p:sp>
       <p:pic>
         <p:nvPicPr>
-          <p:cNvPr id="10" name="図 9">
+          <p:cNvPr id="3" name="図 2">
             <a:extLst>
               <a:ext uri="{FF2B5EF4-FFF2-40B4-BE49-F238E27FC236}">
-                <a16:creationId xmlns:a16="http://schemas.microsoft.com/office/drawing/2014/main" id="{6C51066F-7C63-4817-BD10-5DFD6A91815C}"/>
+                <a16:creationId xmlns:a16="http://schemas.microsoft.com/office/drawing/2014/main" id="{6AC6368C-3814-475F-B6C4-34986110AA0A}"/>
               </a:ext>
             </a:extLst>
           </p:cNvPr>
@@ -3893,13 +3893,7 @@
           <p:nvPr/>
         </p:nvPicPr>
         <p:blipFill>
-          <a:blip r:embed="rId2">
-            <a:extLst>
-              <a:ext uri="{28A0092B-C50C-407E-A947-70E740481C1C}">
-                <a14:useLocalDpi xmlns:a14="http://schemas.microsoft.com/office/drawing/2010/main" val="0"/>
-              </a:ext>
-            </a:extLst>
-          </a:blip>
+          <a:blip r:embed="rId2"/>
           <a:stretch>
             <a:fillRect/>
           </a:stretch>
@@ -3907,7 +3901,7 @@
         <p:spPr>
           <a:xfrm>
             <a:off x="567542" y="1817794"/>
-            <a:ext cx="9003882" cy="4011506"/>
+            <a:ext cx="5367591" cy="4601897"/>
           </a:xfrm>
           <a:prstGeom prst="rect">
             <a:avLst/>
@@ -3916,10 +3910,10 @@
       </p:pic>
       <p:sp>
         <p:nvSpPr>
-          <p:cNvPr id="11" name="正方形/長方形 10">
+          <p:cNvPr id="8" name="正方形/長方形 7">
             <a:extLst>
               <a:ext uri="{FF2B5EF4-FFF2-40B4-BE49-F238E27FC236}">
-                <a16:creationId xmlns:a16="http://schemas.microsoft.com/office/drawing/2014/main" id="{D21C966A-BDE6-437E-8BAB-A4EE74CBD047}"/>
+                <a16:creationId xmlns:a16="http://schemas.microsoft.com/office/drawing/2014/main" id="{52C01B2B-86C6-49A8-81F4-0C72F6625799}"/>
               </a:ext>
             </a:extLst>
           </p:cNvPr>
@@ -3928,8 +3922,8 @@
         </p:nvSpPr>
         <p:spPr>
           <a:xfrm>
-            <a:off x="2109064" y="3733800"/>
-            <a:ext cx="7606436" cy="1765300"/>
+            <a:off x="1566333" y="5139267"/>
+            <a:ext cx="4368800" cy="1143001"/>
           </a:xfrm>
           <a:prstGeom prst="rect">
             <a:avLst/>
@@ -6854,7 +6848,7 @@
         <p:spPr>
           <a:xfrm>
             <a:off x="567542" y="1216429"/>
-            <a:ext cx="4437433" cy="461665"/>
+            <a:ext cx="4499950" cy="461665"/>
           </a:xfrm>
           <a:prstGeom prst="rect">
             <a:avLst/>
@@ -6868,7 +6862,11 @@
           <a:lstStyle/>
           <a:p>
             <a:r>
-              <a:rPr kumimoji="1" lang="en-US" altLang="ja-JP" sz="2400" dirty="0" err="1"/>
+              <a:rPr kumimoji="1" lang="en-US" altLang="ja-JP" sz="2400" b="1" dirty="0" err="1">
+                <a:solidFill>
+                  <a:srgbClr val="00B050"/>
+                </a:solidFill>
+              </a:rPr>
               <a:t>MyMath</a:t>
             </a:r>
             <a:r>
@@ -6881,10 +6879,10 @@
       </p:sp>
       <p:pic>
         <p:nvPicPr>
-          <p:cNvPr id="3" name="図 2">
+          <p:cNvPr id="7" name="図 6">
             <a:extLst>
               <a:ext uri="{FF2B5EF4-FFF2-40B4-BE49-F238E27FC236}">
-                <a16:creationId xmlns:a16="http://schemas.microsoft.com/office/drawing/2014/main" id="{24DCF4FC-2676-458C-9EB4-55160615AE64}"/>
+                <a16:creationId xmlns:a16="http://schemas.microsoft.com/office/drawing/2014/main" id="{AB15A4F9-3BEE-48AC-9949-B5E85887F45F}"/>
               </a:ext>
             </a:extLst>
           </p:cNvPr>
@@ -6894,13 +6892,7 @@
           <p:nvPr/>
         </p:nvPicPr>
         <p:blipFill>
-          <a:blip r:embed="rId2">
-            <a:extLst>
-              <a:ext uri="{28A0092B-C50C-407E-A947-70E740481C1C}">
-                <a14:useLocalDpi xmlns:a14="http://schemas.microsoft.com/office/drawing/2010/main" val="0"/>
-              </a:ext>
-            </a:extLst>
-          </a:blip>
+          <a:blip r:embed="rId2"/>
           <a:stretch>
             <a:fillRect/>
           </a:stretch>
@@ -6908,7 +6900,7 @@
         <p:spPr>
           <a:xfrm>
             <a:off x="567542" y="1817794"/>
-            <a:ext cx="6578722" cy="4548252"/>
+            <a:ext cx="6487430" cy="4382112"/>
           </a:xfrm>
           <a:prstGeom prst="rect">
             <a:avLst/>
@@ -6917,10 +6909,10 @@
       </p:pic>
       <p:sp>
         <p:nvSpPr>
-          <p:cNvPr id="5" name="正方形/長方形 4">
+          <p:cNvPr id="8" name="正方形/長方形 7">
             <a:extLst>
               <a:ext uri="{FF2B5EF4-FFF2-40B4-BE49-F238E27FC236}">
-                <a16:creationId xmlns:a16="http://schemas.microsoft.com/office/drawing/2014/main" id="{60CCC53F-65E6-49F6-B889-497CB19580E6}"/>
+                <a16:creationId xmlns:a16="http://schemas.microsoft.com/office/drawing/2014/main" id="{F691CACE-6587-4CC3-ACDA-01A95143257B}"/>
               </a:ext>
             </a:extLst>
           </p:cNvPr>
@@ -6929,8 +6921,8 @@
         </p:nvSpPr>
         <p:spPr>
           <a:xfrm>
-            <a:off x="1560708" y="4419600"/>
-            <a:ext cx="4903592" cy="1485900"/>
+            <a:off x="1873975" y="4448810"/>
+            <a:ext cx="4903592" cy="1596389"/>
           </a:xfrm>
           <a:prstGeom prst="rect">
             <a:avLst/>
@@ -9589,8 +9581,8 @@
           </a:p>
         </p:txBody>
       </p:sp>
-      <mc:AlternateContent xmlns:mc="http://schemas.openxmlformats.org/markup-compatibility/2006">
-        <mc:Choice xmlns:a14="http://schemas.microsoft.com/office/drawing/2010/main" Requires="a14">
+      <mc:AlternateContent xmlns:mc="http://schemas.openxmlformats.org/markup-compatibility/2006" xmlns:a14="http://schemas.microsoft.com/office/drawing/2010/main">
+        <mc:Choice Requires="a14">
           <p:sp>
             <p:nvSpPr>
               <p:cNvPr id="6" name="テキスト ボックス 5">
@@ -10027,7 +10019,7 @@
             </p:txBody>
           </p:sp>
         </mc:Choice>
-        <mc:Fallback>
+        <mc:Fallback xmlns="">
           <p:sp>
             <p:nvSpPr>
               <p:cNvPr id="6" name="テキスト ボックス 5">
